--- a/docs/customer-documents/orgcomp-series/Vol_VII_Book_00_OrgComp_ServiceNow_Automation_Overview.pptx
+++ b/docs/customer-documents/orgcomp-series/Vol_VII_Book_00_OrgComp_ServiceNow_Automation_Overview.pptx
@@ -513,7 +513,7 @@
           <a:p/>
           <a:p>
             <a:r>
-              <a:t>Vendor sources: host repo: docs/customer-documents/federal-aan-series/</a:t>
+              <a:t>Vendor sources: host repo: docs/customer-documents/orgcomp-series/</a:t>
             </a:r>
           </a:p>
         </p:txBody>
@@ -659,7 +659,7 @@
           <a:p/>
           <a:p>
             <a:r>
-              <a:t>Vendor sources: https://learn.microsoft.com/graph/ | https://www.cisa.gov/scuba | host repo: docs/customer-documents/federal-aan-series/Vol_I_Book_01_FedAAN_SSA_Landing_Zone_IPAM_FedRAMP.qmd</a:t>
+              <a:t>Vendor sources: https://learn.microsoft.com/graph/ | https://www.cisa.gov/scuba | host repo: docs/customer-documents/orgcomp-series/Vol_I_Book_01_OrgComp_SSA_Landing_Zone_IPAM_FedRAMP.qmd</a:t>
             </a:r>
           </a:p>
         </p:txBody>
@@ -4634,7 +4634,7 @@
                 </a:solidFill>
                 <a:latin typeface="Arial"/>
               </a:rPr>
-              <a:t>Date Code: 2026-07-12 15:00 ET</a:t>
+              <a:t>Date Code: 2026-07-19 16:20 ET</a:t>
             </a:r>
           </a:p>
         </p:txBody>
@@ -4822,7 +4822,7 @@
                 </a:solidFill>
                 <a:latin typeface="Arial"/>
               </a:rPr>
-              <a:t>ServiceNow Automation for Federal Control Compliance · Date Code: 2026-07-12 15:00 ET</a:t>
+              <a:t>ServiceNow Automation for Federal Control Compliance · Date Code: 2026-07-19 16:20 ET</a:t>
             </a:r>
           </a:p>
         </p:txBody>
@@ -5045,7 +5045,7 @@
                 </a:solidFill>
                 <a:latin typeface="Arial"/>
               </a:rPr>
-              <a:t>ServiceNow Automation for Federal Control Compliance · Date Code: 2026-07-12 15:00 ET</a:t>
+              <a:t>ServiceNow Automation for Federal Control Compliance · Date Code: 2026-07-19 16:20 ET</a:t>
             </a:r>
           </a:p>
         </p:txBody>
@@ -5952,7 +5952,7 @@
                 </a:solidFill>
                 <a:latin typeface="Arial"/>
               </a:rPr>
-              <a:t>ServiceNow Automation for Federal Control Compliance · Date Code: 2026-07-12 15:00 ET</a:t>
+              <a:t>ServiceNow Automation for Federal Control Compliance · Date Code: 2026-07-19 16:20 ET</a:t>
             </a:r>
           </a:p>
         </p:txBody>
@@ -6678,7 +6678,7 @@
                 </a:solidFill>
                 <a:latin typeface="Arial"/>
               </a:rPr>
-              <a:t>ServiceNow Automation for Federal Control Compliance · Date Code: 2026-07-12 15:00 ET</a:t>
+              <a:t>ServiceNow Automation for Federal Control Compliance · Date Code: 2026-07-19 16:20 ET</a:t>
             </a:r>
           </a:p>
         </p:txBody>
@@ -7579,7 +7579,7 @@
                 </a:solidFill>
                 <a:latin typeface="Arial"/>
               </a:rPr>
-              <a:t>ServiceNow Automation for Federal Control Compliance · Date Code: 2026-07-12 15:00 ET</a:t>
+              <a:t>ServiceNow Automation for Federal Control Compliance · Date Code: 2026-07-19 16:20 ET</a:t>
             </a:r>
           </a:p>
         </p:txBody>

--- a/docs/customer-documents/orgcomp-series/Vol_VII_Book_00_OrgComp_ServiceNow_Automation_Overview.pptx
+++ b/docs/customer-documents/orgcomp-series/Vol_VII_Book_00_OrgComp_ServiceNow_Automation_Overview.pptx
@@ -4634,7 +4634,7 @@
                 </a:solidFill>
                 <a:latin typeface="Arial"/>
               </a:rPr>
-              <a:t>Date Code: 2026-07-19 16:20 ET</a:t>
+              <a:t>Date Code: 2026-07-27 19:57 ET</a:t>
             </a:r>
           </a:p>
         </p:txBody>
@@ -4822,7 +4822,7 @@
                 </a:solidFill>
                 <a:latin typeface="Arial"/>
               </a:rPr>
-              <a:t>ServiceNow Automation for Federal Control Compliance · Date Code: 2026-07-19 16:20 ET</a:t>
+              <a:t>ServiceNow Automation for Federal Control Compliance · Date Code: 2026-07-27 19:57 ET</a:t>
             </a:r>
           </a:p>
         </p:txBody>
@@ -5045,7 +5045,7 @@
                 </a:solidFill>
                 <a:latin typeface="Arial"/>
               </a:rPr>
-              <a:t>ServiceNow Automation for Federal Control Compliance · Date Code: 2026-07-19 16:20 ET</a:t>
+              <a:t>ServiceNow Automation for Federal Control Compliance · Date Code: 2026-07-27 19:57 ET</a:t>
             </a:r>
           </a:p>
         </p:txBody>
@@ -5952,7 +5952,7 @@
                 </a:solidFill>
                 <a:latin typeface="Arial"/>
               </a:rPr>
-              <a:t>ServiceNow Automation for Federal Control Compliance · Date Code: 2026-07-19 16:20 ET</a:t>
+              <a:t>ServiceNow Automation for Federal Control Compliance · Date Code: 2026-07-27 19:57 ET</a:t>
             </a:r>
           </a:p>
         </p:txBody>
@@ -6678,7 +6678,7 @@
                 </a:solidFill>
                 <a:latin typeface="Arial"/>
               </a:rPr>
-              <a:t>ServiceNow Automation for Federal Control Compliance · Date Code: 2026-07-19 16:20 ET</a:t>
+              <a:t>ServiceNow Automation for Federal Control Compliance · Date Code: 2026-07-27 19:57 ET</a:t>
             </a:r>
           </a:p>
         </p:txBody>
@@ -7579,7 +7579,7 @@
                 </a:solidFill>
                 <a:latin typeface="Arial"/>
               </a:rPr>
-              <a:t>ServiceNow Automation for Federal Control Compliance · Date Code: 2026-07-19 16:20 ET</a:t>
+              <a:t>ServiceNow Automation for Federal Control Compliance · Date Code: 2026-07-27 19:57 ET</a:t>
             </a:r>
           </a:p>
         </p:txBody>
